--- a/assets/powerpoints/module-n2-classe/A3-de-quelle-couleur.pptx
+++ b/assets/powerpoints/module-n2-classe/A3-de-quelle-couleur.pptx
@@ -8847,7 +8847,43 @@
                 </a:solidFill>
                 <a:latin typeface="Verdana"/>
               </a:rPr>
-              <a:t>« Le &lt;b&gt;rouge&lt;/b&gt;, s'il vous plaît. » « Le grand &lt;b&gt;bleu&lt;/b&gt;, là. » On montre du doigt et on dit la couleur : l'enseignante comprend, et donne le nom de l'objet en même temps.</a:t>
+              <a:t>« Le </a:t>
+            </a:r>
+            <a:r>
+              <a:rPr sz="2000" b="1" i="0">
+                <a:solidFill>
+                  <a:srgbClr val="4B4F52"/>
+                </a:solidFill>
+                <a:latin typeface="Verdana"/>
+              </a:rPr>
+              <a:t>rouge</a:t>
+            </a:r>
+            <a:r>
+              <a:rPr sz="2000" b="0" i="0">
+                <a:solidFill>
+                  <a:srgbClr val="4B4F52"/>
+                </a:solidFill>
+                <a:latin typeface="Verdana"/>
+              </a:rPr>
+              <a:t>, s'il vous plaît. » « Le grand </a:t>
+            </a:r>
+            <a:r>
+              <a:rPr sz="2000" b="1" i="0">
+                <a:solidFill>
+                  <a:srgbClr val="4B4F52"/>
+                </a:solidFill>
+                <a:latin typeface="Verdana"/>
+              </a:rPr>
+              <a:t>bleu</a:t>
+            </a:r>
+            <a:r>
+              <a:rPr sz="2000" b="0" i="0">
+                <a:solidFill>
+                  <a:srgbClr val="4B4F52"/>
+                </a:solidFill>
+                <a:latin typeface="Verdana"/>
+              </a:rPr>
+              <a:t>, là. » On montre du doigt et on dit la couleur : l'enseignante comprend, et donne le nom de l'objet en même temps.</a:t>
             </a:r>
           </a:p>
         </p:txBody>
